--- a/ゲーム科2年/00_前期/ゲーム開発Ⅲ/ゲーム物理学/座学/21_運動エネルギー.pptx
+++ b/ゲーム科2年/00_前期/ゲーム開発Ⅲ/ゲーム物理学/座学/21_運動エネルギー.pptx
@@ -264,7 +264,7 @@
           <a:p>
             <a:fld id="{E9CC885B-4903-4D54-9A93-00025F12DED9}" type="datetimeFigureOut">
               <a:rPr kumimoji="1" lang="ja-JP" altLang="en-US" smtClean="0"/>
-              <a:t>2025/10/2</a:t>
+              <a:t>2025/10/31</a:t>
             </a:fld>
             <a:endParaRPr kumimoji="1" lang="ja-JP" altLang="en-US"/>
           </a:p>
@@ -494,7 +494,7 @@
           <a:p>
             <a:fld id="{E9CC885B-4903-4D54-9A93-00025F12DED9}" type="datetimeFigureOut">
               <a:rPr kumimoji="1" lang="ja-JP" altLang="en-US" smtClean="0"/>
-              <a:t>2025/10/2</a:t>
+              <a:t>2025/10/31</a:t>
             </a:fld>
             <a:endParaRPr kumimoji="1" lang="ja-JP" altLang="en-US"/>
           </a:p>
@@ -734,7 +734,7 @@
           <a:p>
             <a:fld id="{E9CC885B-4903-4D54-9A93-00025F12DED9}" type="datetimeFigureOut">
               <a:rPr kumimoji="1" lang="ja-JP" altLang="en-US" smtClean="0"/>
-              <a:t>2025/10/2</a:t>
+              <a:t>2025/10/31</a:t>
             </a:fld>
             <a:endParaRPr kumimoji="1" lang="ja-JP" altLang="en-US"/>
           </a:p>
@@ -964,7 +964,7 @@
           <a:p>
             <a:fld id="{E9CC885B-4903-4D54-9A93-00025F12DED9}" type="datetimeFigureOut">
               <a:rPr kumimoji="1" lang="ja-JP" altLang="en-US" smtClean="0"/>
-              <a:t>2025/10/2</a:t>
+              <a:t>2025/10/31</a:t>
             </a:fld>
             <a:endParaRPr kumimoji="1" lang="ja-JP" altLang="en-US"/>
           </a:p>
@@ -1239,7 +1239,7 @@
           <a:p>
             <a:fld id="{E9CC885B-4903-4D54-9A93-00025F12DED9}" type="datetimeFigureOut">
               <a:rPr kumimoji="1" lang="ja-JP" altLang="en-US" smtClean="0"/>
-              <a:t>2025/10/2</a:t>
+              <a:t>2025/10/31</a:t>
             </a:fld>
             <a:endParaRPr kumimoji="1" lang="ja-JP" altLang="en-US"/>
           </a:p>
@@ -1568,7 +1568,7 @@
           <a:p>
             <a:fld id="{E9CC885B-4903-4D54-9A93-00025F12DED9}" type="datetimeFigureOut">
               <a:rPr kumimoji="1" lang="ja-JP" altLang="en-US" smtClean="0"/>
-              <a:t>2025/10/2</a:t>
+              <a:t>2025/10/31</a:t>
             </a:fld>
             <a:endParaRPr kumimoji="1" lang="ja-JP" altLang="en-US"/>
           </a:p>
@@ -2044,7 +2044,7 @@
           <a:p>
             <a:fld id="{E9CC885B-4903-4D54-9A93-00025F12DED9}" type="datetimeFigureOut">
               <a:rPr kumimoji="1" lang="ja-JP" altLang="en-US" smtClean="0"/>
-              <a:t>2025/10/2</a:t>
+              <a:t>2025/10/31</a:t>
             </a:fld>
             <a:endParaRPr kumimoji="1" lang="ja-JP" altLang="en-US"/>
           </a:p>
@@ -2185,7 +2185,7 @@
           <a:p>
             <a:fld id="{E9CC885B-4903-4D54-9A93-00025F12DED9}" type="datetimeFigureOut">
               <a:rPr kumimoji="1" lang="ja-JP" altLang="en-US" smtClean="0"/>
-              <a:t>2025/10/2</a:t>
+              <a:t>2025/10/31</a:t>
             </a:fld>
             <a:endParaRPr kumimoji="1" lang="ja-JP" altLang="en-US"/>
           </a:p>
@@ -2298,7 +2298,7 @@
           <a:p>
             <a:fld id="{E9CC885B-4903-4D54-9A93-00025F12DED9}" type="datetimeFigureOut">
               <a:rPr kumimoji="1" lang="ja-JP" altLang="en-US" smtClean="0"/>
-              <a:t>2025/10/2</a:t>
+              <a:t>2025/10/31</a:t>
             </a:fld>
             <a:endParaRPr kumimoji="1" lang="ja-JP" altLang="en-US"/>
           </a:p>
@@ -2641,7 +2641,7 @@
           <a:p>
             <a:fld id="{E9CC885B-4903-4D54-9A93-00025F12DED9}" type="datetimeFigureOut">
               <a:rPr kumimoji="1" lang="ja-JP" altLang="en-US" smtClean="0"/>
-              <a:t>2025/10/2</a:t>
+              <a:t>2025/10/31</a:t>
             </a:fld>
             <a:endParaRPr kumimoji="1" lang="ja-JP" altLang="en-US"/>
           </a:p>
@@ -2929,7 +2929,7 @@
           <a:p>
             <a:fld id="{E9CC885B-4903-4D54-9A93-00025F12DED9}" type="datetimeFigureOut">
               <a:rPr kumimoji="1" lang="ja-JP" altLang="en-US" smtClean="0"/>
-              <a:t>2025/10/2</a:t>
+              <a:t>2025/10/31</a:t>
             </a:fld>
             <a:endParaRPr kumimoji="1" lang="ja-JP" altLang="en-US"/>
           </a:p>
@@ -3202,7 +3202,7 @@
           <a:p>
             <a:fld id="{E9CC885B-4903-4D54-9A93-00025F12DED9}" type="datetimeFigureOut">
               <a:rPr kumimoji="1" lang="ja-JP" altLang="en-US" smtClean="0"/>
-              <a:t>2025/10/2</a:t>
+              <a:t>2025/10/31</a:t>
             </a:fld>
             <a:endParaRPr kumimoji="1" lang="ja-JP" altLang="en-US"/>
           </a:p>
@@ -5614,7 +5614,7 @@
         <p:spPr>
           <a:xfrm>
             <a:off x="567542" y="491954"/>
-            <a:ext cx="3995004" cy="584775"/>
+            <a:ext cx="3174267" cy="584775"/>
           </a:xfrm>
           <a:prstGeom prst="rect">
             <a:avLst/>
@@ -5629,14 +5629,14 @@
           <a:p>
             <a:r>
               <a:rPr kumimoji="1" lang="ja-JP" altLang="en-US" sz="3200" b="1" u="sng" dirty="0"/>
-              <a:t>運動エネルギー 例題</a:t>
+              <a:t>運動エネルギー</a:t>
             </a:r>
             <a:endParaRPr kumimoji="1" lang="en-US" altLang="ja-JP" sz="3200" b="1" u="sng" dirty="0"/>
           </a:p>
         </p:txBody>
       </p:sp>
-      <mc:AlternateContent xmlns:mc="http://schemas.openxmlformats.org/markup-compatibility/2006">
-        <mc:Choice xmlns:a14="http://schemas.microsoft.com/office/drawing/2010/main" Requires="a14">
+      <mc:AlternateContent xmlns:mc="http://schemas.openxmlformats.org/markup-compatibility/2006" xmlns:a14="http://schemas.microsoft.com/office/drawing/2010/main">
+        <mc:Choice Requires="a14">
           <p:sp>
             <p:nvSpPr>
               <p:cNvPr id="6" name="テキスト ボックス 5">
@@ -6085,7 +6085,7 @@
             </p:txBody>
           </p:sp>
         </mc:Choice>
-        <mc:Fallback>
+        <mc:Fallback xmlns="">
           <p:sp>
             <p:nvSpPr>
               <p:cNvPr id="6" name="テキスト ボックス 5">
@@ -6189,15 +6189,15 @@
           <a:lstStyle/>
           <a:p>
             <a:r>
-              <a:rPr kumimoji="1" lang="ja-JP" altLang="en-US" sz="3200" b="1" u="sng" dirty="0"/>
+              <a:rPr kumimoji="1" lang="ja-JP" altLang="en-US" sz="3200" b="1" u="sng"/>
               <a:t>運動エネルギー 例題</a:t>
             </a:r>
             <a:endParaRPr kumimoji="1" lang="en-US" altLang="ja-JP" sz="3200" b="1" u="sng" dirty="0"/>
           </a:p>
         </p:txBody>
       </p:sp>
-      <mc:AlternateContent xmlns:mc="http://schemas.openxmlformats.org/markup-compatibility/2006">
-        <mc:Choice xmlns:a14="http://schemas.microsoft.com/office/drawing/2010/main" Requires="a14">
+      <mc:AlternateContent xmlns:mc="http://schemas.openxmlformats.org/markup-compatibility/2006" xmlns:a14="http://schemas.microsoft.com/office/drawing/2010/main">
+        <mc:Choice Requires="a14">
           <p:sp>
             <p:nvSpPr>
               <p:cNvPr id="6" name="テキスト ボックス 5">
@@ -6698,13 +6698,7 @@
                       <a:rPr lang="en-US" altLang="ja-JP" sz="2400" b="0" i="1" smtClean="0">
                         <a:latin typeface="Cambria Math" panose="02040503050406030204" pitchFamily="18" charset="0"/>
                       </a:rPr>
-                      <m:t>−</m:t>
-                    </m:r>
-                    <m:r>
-                      <a:rPr lang="en-US" altLang="ja-JP" sz="2400" b="0" i="1" smtClean="0">
-                        <a:latin typeface="Cambria Math" panose="02040503050406030204" pitchFamily="18" charset="0"/>
-                      </a:rPr>
-                      <m:t>0</m:t>
+                      <m:t>−0</m:t>
                     </m:r>
                   </m:oMath>
                 </a14:m>
@@ -7052,7 +7046,7 @@
             </p:txBody>
           </p:sp>
         </mc:Choice>
-        <mc:Fallback>
+        <mc:Fallback xmlns="">
           <p:sp>
             <p:nvSpPr>
               <p:cNvPr id="6" name="テキスト ボックス 5">
@@ -7157,14 +7151,14 @@
           <a:p>
             <a:r>
               <a:rPr kumimoji="1" lang="ja-JP" altLang="en-US" sz="3200" b="1" u="sng" dirty="0"/>
-              <a:t>運動エネルギー 例題</a:t>
+              <a:t>運動エネルギー 練習</a:t>
             </a:r>
             <a:endParaRPr kumimoji="1" lang="en-US" altLang="ja-JP" sz="3200" b="1" u="sng" dirty="0"/>
           </a:p>
         </p:txBody>
       </p:sp>
-      <mc:AlternateContent xmlns:mc="http://schemas.openxmlformats.org/markup-compatibility/2006">
-        <mc:Choice xmlns:a14="http://schemas.microsoft.com/office/drawing/2010/main" Requires="a14">
+      <mc:AlternateContent xmlns:mc="http://schemas.openxmlformats.org/markup-compatibility/2006" xmlns:a14="http://schemas.microsoft.com/office/drawing/2010/main">
+        <mc:Choice Requires="a14">
           <p:sp>
             <p:nvSpPr>
               <p:cNvPr id="6" name="テキスト ボックス 5">
@@ -7424,7 +7418,7 @@
             </p:txBody>
           </p:sp>
         </mc:Choice>
-        <mc:Fallback>
+        <mc:Fallback xmlns="">
           <p:sp>
             <p:nvSpPr>
               <p:cNvPr id="6" name="テキスト ボックス 5">
